--- a/заняття_11/Amazon_SageMaker_AI.pptx
+++ b/заняття_11/Amazon_SageMaker_AI.pptx
@@ -5074,7 +5074,7 @@
               </a:defRPr>
             </a:pPr>
             <a:r>
-              <a:rPr sz="3150" b="1">
+              <a:rPr sz="3150" b="1" dirty="0">
                 <a:solidFill>
                   <a:srgbClr val="14283F"/>
                 </a:solidFill>
@@ -5082,7 +5082,7 @@
                 <a:ea typeface="Arial"/>
                 <a:cs typeface="Arial"/>
               </a:rPr>
-              <a:t>Демо: SageMaker Studio UI</a:t>
+              <a:t>SageMaker Studio UI</a:t>
             </a:r>
           </a:p>
         </p:txBody>
@@ -7826,16 +7826,24 @@
               <a:t> </a:t>
             </a:r>
             <a:r>
+              <a:rPr lang="uk-UA" dirty="0"/>
+              <a:t>потрібно </a:t>
+            </a:r>
+            <a:r>
               <a:rPr dirty="0" err="1"/>
-              <a:t>замініть</a:t>
+              <a:t>замін</a:t>
+            </a:r>
+            <a:r>
+              <a:rPr lang="uk-UA" dirty="0" err="1"/>
+              <a:t>ити</a:t>
             </a:r>
             <a:r>
               <a:rPr dirty="0"/>
               <a:t> </a:t>
             </a:r>
             <a:r>
-              <a:rPr dirty="0" err="1"/>
-              <a:t>своїми</a:t>
+              <a:rPr lang="uk-UA" dirty="0"/>
+              <a:t>власними</a:t>
             </a:r>
             <a:r>
               <a:rPr dirty="0"/>
@@ -8513,7 +8521,7 @@
                     <a:lstStyle/>
                     <a:p>
                       <a:r>
-                        <a:rPr sz="1800" b="0">
+                        <a:rPr sz="1800" b="0" dirty="0">
                           <a:solidFill>
                             <a:srgbClr val="14283F"/>
                           </a:solidFill>
@@ -8521,8 +8529,49 @@
                           <a:ea typeface="Arial"/>
                           <a:cs typeface="Arial"/>
                         </a:rPr>
-                        <a:t>Real-time: час роботи ресурсів</a:t>
+                        <a:t>Real-time: </a:t>
                       </a:r>
+                      <a:r>
+                        <a:rPr sz="1800" b="0" dirty="0" err="1">
+                          <a:solidFill>
+                            <a:srgbClr val="14283F"/>
+                          </a:solidFill>
+                          <a:latin typeface="Arial"/>
+                          <a:ea typeface="Arial"/>
+                          <a:cs typeface="Arial"/>
+                        </a:rPr>
+                        <a:t>час</a:t>
+                      </a:r>
+                      <a:r>
+                        <a:rPr sz="1800" b="0" dirty="0">
+                          <a:solidFill>
+                            <a:srgbClr val="14283F"/>
+                          </a:solidFill>
+                          <a:latin typeface="Arial"/>
+                          <a:ea typeface="Arial"/>
+                          <a:cs typeface="Arial"/>
+                        </a:rPr>
+                        <a:t> роботи </a:t>
+                      </a:r>
+                      <a:r>
+                        <a:rPr sz="1800" b="0" dirty="0" err="1">
+                          <a:solidFill>
+                            <a:srgbClr val="14283F"/>
+                          </a:solidFill>
+                          <a:latin typeface="Arial"/>
+                          <a:ea typeface="Arial"/>
+                          <a:cs typeface="Arial"/>
+                        </a:rPr>
+                        <a:t>ресурсів</a:t>
+                      </a:r>
+                      <a:endParaRPr sz="1800" b="0" dirty="0">
+                        <a:solidFill>
+                          <a:srgbClr val="14283F"/>
+                        </a:solidFill>
+                        <a:latin typeface="Arial"/>
+                        <a:ea typeface="Arial"/>
+                        <a:cs typeface="Arial"/>
+                      </a:endParaRPr>
                     </a:p>
                   </a:txBody>
                   <a:tcPr>
@@ -8568,6 +8617,39 @@
                     <a:lstStyle/>
                     <a:p>
                       <a:r>
+                        <a:rPr sz="1800" b="0" dirty="0" err="1">
+                          <a:solidFill>
+                            <a:srgbClr val="14283F"/>
+                          </a:solidFill>
+                          <a:latin typeface="Arial"/>
+                          <a:ea typeface="Arial"/>
+                          <a:cs typeface="Arial"/>
+                        </a:rPr>
+                        <a:t>Швидке</a:t>
+                      </a:r>
+                      <a:r>
+                        <a:rPr sz="1800" b="0" dirty="0">
+                          <a:solidFill>
+                            <a:srgbClr val="14283F"/>
+                          </a:solidFill>
+                          <a:latin typeface="Arial"/>
+                          <a:ea typeface="Arial"/>
+                          <a:cs typeface="Arial"/>
+                        </a:rPr>
+                        <a:t> </a:t>
+                      </a:r>
+                      <a:r>
+                        <a:rPr sz="1800" b="0" dirty="0" err="1">
+                          <a:solidFill>
+                            <a:srgbClr val="14283F"/>
+                          </a:solidFill>
+                          <a:latin typeface="Arial"/>
+                          <a:ea typeface="Arial"/>
+                          <a:cs typeface="Arial"/>
+                        </a:rPr>
+                        <a:t>підключення</a:t>
+                      </a:r>
+                      <a:r>
                         <a:rPr sz="1800" b="0">
                           <a:solidFill>
                             <a:srgbClr val="14283F"/>
@@ -8576,7 +8658,7 @@
                           <a:ea typeface="Arial"/>
                           <a:cs typeface="Arial"/>
                         </a:rPr>
-                        <a:t>Швидке підключення GenAI</a:t>
+                        <a:t> GenAI</a:t>
                       </a:r>
                     </a:p>
                   </a:txBody>
